--- a/public/fun/cards/food/food-20.pptx
+++ b/public/fun/cards/food/food-20.pptx
@@ -3085,7 +3085,7 @@
     <p:bg>
       <p:bgPr>
         <a:solidFill>
-          <a:srgbClr val="7B3759"/>
+          <a:srgbClr val="C93CE0"/>
         </a:solidFill>
         <a:effectLst/>
       </p:bgPr>
@@ -3099,22 +3099,20 @@
       <p:grpSpPr/>
       <p:sp>
         <p:nvSpPr>
-          <p:cNvPr id="2" name="Oval 1"/>
+          <p:cNvPr id="2" name="Rectangle 1"/>
           <p:cNvSpPr/>
           <p:nvPr/>
         </p:nvSpPr>
         <p:spPr>
           <a:xfrm>
-            <a:off x="2462400" y="158400"/>
-            <a:ext cx="43200" cy="43200"/>
+            <a:off x="252000" y="144000"/>
+            <a:ext cx="201600" cy="21600"/>
           </a:xfrm>
-          <a:prstGeom prst="ellipse">
+          <a:prstGeom prst="rect">
             <a:avLst/>
           </a:prstGeom>
           <a:solidFill>
-            <a:srgbClr val="CC8DAC">
-              <a:alpha val="70000"/>
-            </a:srgbClr>
+            <a:srgbClr val="FFFFFF"/>
           </a:solidFill>
           <a:ln>
             <a:noFill/>
@@ -3130,661 +3128,14 @@
       </p:sp>
       <p:sp>
         <p:nvSpPr>
-          <p:cNvPr id="3" name="Oval 2"/>
-          <p:cNvSpPr/>
+          <p:cNvPr id="3" name="텍스트"/>
+          <p:cNvSpPr txBox="1"/>
           <p:nvPr/>
         </p:nvSpPr>
         <p:spPr>
           <a:xfrm>
-            <a:off x="2462400" y="266400"/>
-            <a:ext cx="43200" cy="43200"/>
-          </a:xfrm>
-          <a:prstGeom prst="ellipse">
-            <a:avLst/>
-          </a:prstGeom>
-          <a:solidFill>
-            <a:srgbClr val="CC8DAC">
-              <a:alpha val="57999"/>
-            </a:srgbClr>
-          </a:solidFill>
-          <a:ln>
-            <a:noFill/>
-          </a:ln>
-        </p:spPr>
-        <p:txBody>
-          <a:bodyPr rtlCol="0" anchor="ctr"/>
-          <a:lstStyle/>
-          <a:p>
-            <a:pPr algn="ctr"/>
-          </a:p>
-        </p:txBody>
-      </p:sp>
-      <p:sp>
-        <p:nvSpPr>
-          <p:cNvPr id="4" name="Oval 3"/>
-          <p:cNvSpPr/>
-          <p:nvPr/>
-        </p:nvSpPr>
-        <p:spPr>
-          <a:xfrm>
-            <a:off x="2462400" y="374400"/>
-            <a:ext cx="43200" cy="43200"/>
-          </a:xfrm>
-          <a:prstGeom prst="ellipse">
-            <a:avLst/>
-          </a:prstGeom>
-          <a:solidFill>
-            <a:srgbClr val="CC8DAC">
-              <a:alpha val="46000"/>
-            </a:srgbClr>
-          </a:solidFill>
-          <a:ln>
-            <a:noFill/>
-          </a:ln>
-        </p:spPr>
-        <p:txBody>
-          <a:bodyPr rtlCol="0" anchor="ctr"/>
-          <a:lstStyle/>
-          <a:p>
-            <a:pPr algn="ctr"/>
-          </a:p>
-        </p:txBody>
-      </p:sp>
-      <p:sp>
-        <p:nvSpPr>
-          <p:cNvPr id="5" name="Oval 4"/>
-          <p:cNvSpPr/>
-          <p:nvPr/>
-        </p:nvSpPr>
-        <p:spPr>
-          <a:xfrm>
-            <a:off x="2462400" y="482400"/>
-            <a:ext cx="43200" cy="43200"/>
-          </a:xfrm>
-          <a:prstGeom prst="ellipse">
-            <a:avLst/>
-          </a:prstGeom>
-          <a:solidFill>
-            <a:srgbClr val="CC8DAC">
-              <a:alpha val="34000"/>
-            </a:srgbClr>
-          </a:solidFill>
-          <a:ln>
-            <a:noFill/>
-          </a:ln>
-        </p:spPr>
-        <p:txBody>
-          <a:bodyPr rtlCol="0" anchor="ctr"/>
-          <a:lstStyle/>
-          <a:p>
-            <a:pPr algn="ctr"/>
-          </a:p>
-        </p:txBody>
-      </p:sp>
-      <p:sp>
-        <p:nvSpPr>
-          <p:cNvPr id="6" name="Oval 5"/>
-          <p:cNvSpPr/>
-          <p:nvPr/>
-        </p:nvSpPr>
-        <p:spPr>
-          <a:xfrm>
-            <a:off x="2570400" y="158400"/>
-            <a:ext cx="43200" cy="43200"/>
-          </a:xfrm>
-          <a:prstGeom prst="ellipse">
-            <a:avLst/>
-          </a:prstGeom>
-          <a:solidFill>
-            <a:srgbClr val="CC8DAC">
-              <a:alpha val="70000"/>
-            </a:srgbClr>
-          </a:solidFill>
-          <a:ln>
-            <a:noFill/>
-          </a:ln>
-        </p:spPr>
-        <p:txBody>
-          <a:bodyPr rtlCol="0" anchor="ctr"/>
-          <a:lstStyle/>
-          <a:p>
-            <a:pPr algn="ctr"/>
-          </a:p>
-        </p:txBody>
-      </p:sp>
-      <p:sp>
-        <p:nvSpPr>
-          <p:cNvPr id="7" name="Oval 6"/>
-          <p:cNvSpPr/>
-          <p:nvPr/>
-        </p:nvSpPr>
-        <p:spPr>
-          <a:xfrm>
-            <a:off x="2570400" y="266400"/>
-            <a:ext cx="43200" cy="43200"/>
-          </a:xfrm>
-          <a:prstGeom prst="ellipse">
-            <a:avLst/>
-          </a:prstGeom>
-          <a:solidFill>
-            <a:srgbClr val="CC8DAC">
-              <a:alpha val="57999"/>
-            </a:srgbClr>
-          </a:solidFill>
-          <a:ln>
-            <a:noFill/>
-          </a:ln>
-        </p:spPr>
-        <p:txBody>
-          <a:bodyPr rtlCol="0" anchor="ctr"/>
-          <a:lstStyle/>
-          <a:p>
-            <a:pPr algn="ctr"/>
-          </a:p>
-        </p:txBody>
-      </p:sp>
-      <p:sp>
-        <p:nvSpPr>
-          <p:cNvPr id="8" name="Oval 7"/>
-          <p:cNvSpPr/>
-          <p:nvPr/>
-        </p:nvSpPr>
-        <p:spPr>
-          <a:xfrm>
-            <a:off x="2570400" y="374400"/>
-            <a:ext cx="43200" cy="43200"/>
-          </a:xfrm>
-          <a:prstGeom prst="ellipse">
-            <a:avLst/>
-          </a:prstGeom>
-          <a:solidFill>
-            <a:srgbClr val="CC8DAC">
-              <a:alpha val="46000"/>
-            </a:srgbClr>
-          </a:solidFill>
-          <a:ln>
-            <a:noFill/>
-          </a:ln>
-        </p:spPr>
-        <p:txBody>
-          <a:bodyPr rtlCol="0" anchor="ctr"/>
-          <a:lstStyle/>
-          <a:p>
-            <a:pPr algn="ctr"/>
-          </a:p>
-        </p:txBody>
-      </p:sp>
-      <p:sp>
-        <p:nvSpPr>
-          <p:cNvPr id="9" name="Oval 8"/>
-          <p:cNvSpPr/>
-          <p:nvPr/>
-        </p:nvSpPr>
-        <p:spPr>
-          <a:xfrm>
-            <a:off x="2570400" y="482400"/>
-            <a:ext cx="43200" cy="43200"/>
-          </a:xfrm>
-          <a:prstGeom prst="ellipse">
-            <a:avLst/>
-          </a:prstGeom>
-          <a:solidFill>
-            <a:srgbClr val="CC8DAC">
-              <a:alpha val="34000"/>
-            </a:srgbClr>
-          </a:solidFill>
-          <a:ln>
-            <a:noFill/>
-          </a:ln>
-        </p:spPr>
-        <p:txBody>
-          <a:bodyPr rtlCol="0" anchor="ctr"/>
-          <a:lstStyle/>
-          <a:p>
-            <a:pPr algn="ctr"/>
-          </a:p>
-        </p:txBody>
-      </p:sp>
-      <p:sp>
-        <p:nvSpPr>
-          <p:cNvPr id="10" name="Oval 9"/>
-          <p:cNvSpPr/>
-          <p:nvPr/>
-        </p:nvSpPr>
-        <p:spPr>
-          <a:xfrm>
-            <a:off x="2678400" y="158400"/>
-            <a:ext cx="43200" cy="43200"/>
-          </a:xfrm>
-          <a:prstGeom prst="ellipse">
-            <a:avLst/>
-          </a:prstGeom>
-          <a:solidFill>
-            <a:srgbClr val="CC8DAC">
-              <a:alpha val="70000"/>
-            </a:srgbClr>
-          </a:solidFill>
-          <a:ln>
-            <a:noFill/>
-          </a:ln>
-        </p:spPr>
-        <p:txBody>
-          <a:bodyPr rtlCol="0" anchor="ctr"/>
-          <a:lstStyle/>
-          <a:p>
-            <a:pPr algn="ctr"/>
-          </a:p>
-        </p:txBody>
-      </p:sp>
-      <p:sp>
-        <p:nvSpPr>
-          <p:cNvPr id="11" name="Oval 10"/>
-          <p:cNvSpPr/>
-          <p:nvPr/>
-        </p:nvSpPr>
-        <p:spPr>
-          <a:xfrm>
-            <a:off x="2678400" y="266400"/>
-            <a:ext cx="43200" cy="43200"/>
-          </a:xfrm>
-          <a:prstGeom prst="ellipse">
-            <a:avLst/>
-          </a:prstGeom>
-          <a:solidFill>
-            <a:srgbClr val="CC8DAC">
-              <a:alpha val="57999"/>
-            </a:srgbClr>
-          </a:solidFill>
-          <a:ln>
-            <a:noFill/>
-          </a:ln>
-        </p:spPr>
-        <p:txBody>
-          <a:bodyPr rtlCol="0" anchor="ctr"/>
-          <a:lstStyle/>
-          <a:p>
-            <a:pPr algn="ctr"/>
-          </a:p>
-        </p:txBody>
-      </p:sp>
-      <p:sp>
-        <p:nvSpPr>
-          <p:cNvPr id="12" name="Oval 11"/>
-          <p:cNvSpPr/>
-          <p:nvPr/>
-        </p:nvSpPr>
-        <p:spPr>
-          <a:xfrm>
-            <a:off x="2678400" y="374400"/>
-            <a:ext cx="43200" cy="43200"/>
-          </a:xfrm>
-          <a:prstGeom prst="ellipse">
-            <a:avLst/>
-          </a:prstGeom>
-          <a:solidFill>
-            <a:srgbClr val="CC8DAC">
-              <a:alpha val="46000"/>
-            </a:srgbClr>
-          </a:solidFill>
-          <a:ln>
-            <a:noFill/>
-          </a:ln>
-        </p:spPr>
-        <p:txBody>
-          <a:bodyPr rtlCol="0" anchor="ctr"/>
-          <a:lstStyle/>
-          <a:p>
-            <a:pPr algn="ctr"/>
-          </a:p>
-        </p:txBody>
-      </p:sp>
-      <p:sp>
-        <p:nvSpPr>
-          <p:cNvPr id="13" name="Oval 12"/>
-          <p:cNvSpPr/>
-          <p:nvPr/>
-        </p:nvSpPr>
-        <p:spPr>
-          <a:xfrm>
-            <a:off x="2678400" y="482400"/>
-            <a:ext cx="43200" cy="43200"/>
-          </a:xfrm>
-          <a:prstGeom prst="ellipse">
-            <a:avLst/>
-          </a:prstGeom>
-          <a:solidFill>
-            <a:srgbClr val="CC8DAC">
-              <a:alpha val="34000"/>
-            </a:srgbClr>
-          </a:solidFill>
-          <a:ln>
-            <a:noFill/>
-          </a:ln>
-        </p:spPr>
-        <p:txBody>
-          <a:bodyPr rtlCol="0" anchor="ctr"/>
-          <a:lstStyle/>
-          <a:p>
-            <a:pPr algn="ctr"/>
-          </a:p>
-        </p:txBody>
-      </p:sp>
-      <p:sp>
-        <p:nvSpPr>
-          <p:cNvPr id="14" name="Oval 13"/>
-          <p:cNvSpPr/>
-          <p:nvPr/>
-        </p:nvSpPr>
-        <p:spPr>
-          <a:xfrm>
-            <a:off x="2786400" y="158400"/>
-            <a:ext cx="43200" cy="43200"/>
-          </a:xfrm>
-          <a:prstGeom prst="ellipse">
-            <a:avLst/>
-          </a:prstGeom>
-          <a:solidFill>
-            <a:srgbClr val="CC8DAC">
-              <a:alpha val="70000"/>
-            </a:srgbClr>
-          </a:solidFill>
-          <a:ln>
-            <a:noFill/>
-          </a:ln>
-        </p:spPr>
-        <p:txBody>
-          <a:bodyPr rtlCol="0" anchor="ctr"/>
-          <a:lstStyle/>
-          <a:p>
-            <a:pPr algn="ctr"/>
-          </a:p>
-        </p:txBody>
-      </p:sp>
-      <p:sp>
-        <p:nvSpPr>
-          <p:cNvPr id="15" name="Oval 14"/>
-          <p:cNvSpPr/>
-          <p:nvPr/>
-        </p:nvSpPr>
-        <p:spPr>
-          <a:xfrm>
-            <a:off x="2786400" y="266400"/>
-            <a:ext cx="43200" cy="43200"/>
-          </a:xfrm>
-          <a:prstGeom prst="ellipse">
-            <a:avLst/>
-          </a:prstGeom>
-          <a:solidFill>
-            <a:srgbClr val="CC8DAC">
-              <a:alpha val="57999"/>
-            </a:srgbClr>
-          </a:solidFill>
-          <a:ln>
-            <a:noFill/>
-          </a:ln>
-        </p:spPr>
-        <p:txBody>
-          <a:bodyPr rtlCol="0" anchor="ctr"/>
-          <a:lstStyle/>
-          <a:p>
-            <a:pPr algn="ctr"/>
-          </a:p>
-        </p:txBody>
-      </p:sp>
-      <p:sp>
-        <p:nvSpPr>
-          <p:cNvPr id="16" name="Oval 15"/>
-          <p:cNvSpPr/>
-          <p:nvPr/>
-        </p:nvSpPr>
-        <p:spPr>
-          <a:xfrm>
-            <a:off x="2786400" y="374400"/>
-            <a:ext cx="43200" cy="43200"/>
-          </a:xfrm>
-          <a:prstGeom prst="ellipse">
-            <a:avLst/>
-          </a:prstGeom>
-          <a:solidFill>
-            <a:srgbClr val="CC8DAC">
-              <a:alpha val="46000"/>
-            </a:srgbClr>
-          </a:solidFill>
-          <a:ln>
-            <a:noFill/>
-          </a:ln>
-        </p:spPr>
-        <p:txBody>
-          <a:bodyPr rtlCol="0" anchor="ctr"/>
-          <a:lstStyle/>
-          <a:p>
-            <a:pPr algn="ctr"/>
-          </a:p>
-        </p:txBody>
-      </p:sp>
-      <p:sp>
-        <p:nvSpPr>
-          <p:cNvPr id="17" name="Oval 16"/>
-          <p:cNvSpPr/>
-          <p:nvPr/>
-        </p:nvSpPr>
-        <p:spPr>
-          <a:xfrm>
-            <a:off x="2786400" y="482400"/>
-            <a:ext cx="43200" cy="43200"/>
-          </a:xfrm>
-          <a:prstGeom prst="ellipse">
-            <a:avLst/>
-          </a:prstGeom>
-          <a:solidFill>
-            <a:srgbClr val="CC8DAC">
-              <a:alpha val="34000"/>
-            </a:srgbClr>
-          </a:solidFill>
-          <a:ln>
-            <a:noFill/>
-          </a:ln>
-        </p:spPr>
-        <p:txBody>
-          <a:bodyPr rtlCol="0" anchor="ctr"/>
-          <a:lstStyle/>
-          <a:p>
-            <a:pPr algn="ctr"/>
-          </a:p>
-        </p:txBody>
-      </p:sp>
-      <p:sp>
-        <p:nvSpPr>
-          <p:cNvPr id="18" name="Oval 17"/>
-          <p:cNvSpPr/>
-          <p:nvPr/>
-        </p:nvSpPr>
-        <p:spPr>
-          <a:xfrm>
-            <a:off x="2894400" y="158400"/>
-            <a:ext cx="43200" cy="43200"/>
-          </a:xfrm>
-          <a:prstGeom prst="ellipse">
-            <a:avLst/>
-          </a:prstGeom>
-          <a:solidFill>
-            <a:srgbClr val="CC8DAC">
-              <a:alpha val="70000"/>
-            </a:srgbClr>
-          </a:solidFill>
-          <a:ln>
-            <a:noFill/>
-          </a:ln>
-        </p:spPr>
-        <p:txBody>
-          <a:bodyPr rtlCol="0" anchor="ctr"/>
-          <a:lstStyle/>
-          <a:p>
-            <a:pPr algn="ctr"/>
-          </a:p>
-        </p:txBody>
-      </p:sp>
-      <p:sp>
-        <p:nvSpPr>
-          <p:cNvPr id="19" name="Oval 18"/>
-          <p:cNvSpPr/>
-          <p:nvPr/>
-        </p:nvSpPr>
-        <p:spPr>
-          <a:xfrm>
-            <a:off x="2894400" y="266400"/>
-            <a:ext cx="43200" cy="43200"/>
-          </a:xfrm>
-          <a:prstGeom prst="ellipse">
-            <a:avLst/>
-          </a:prstGeom>
-          <a:solidFill>
-            <a:srgbClr val="CC8DAC">
-              <a:alpha val="57999"/>
-            </a:srgbClr>
-          </a:solidFill>
-          <a:ln>
-            <a:noFill/>
-          </a:ln>
-        </p:spPr>
-        <p:txBody>
-          <a:bodyPr rtlCol="0" anchor="ctr"/>
-          <a:lstStyle/>
-          <a:p>
-            <a:pPr algn="ctr"/>
-          </a:p>
-        </p:txBody>
-      </p:sp>
-      <p:sp>
-        <p:nvSpPr>
-          <p:cNvPr id="20" name="Oval 19"/>
-          <p:cNvSpPr/>
-          <p:nvPr/>
-        </p:nvSpPr>
-        <p:spPr>
-          <a:xfrm>
-            <a:off x="2894400" y="374400"/>
-            <a:ext cx="43200" cy="43200"/>
-          </a:xfrm>
-          <a:prstGeom prst="ellipse">
-            <a:avLst/>
-          </a:prstGeom>
-          <a:solidFill>
-            <a:srgbClr val="CC8DAC">
-              <a:alpha val="46000"/>
-            </a:srgbClr>
-          </a:solidFill>
-          <a:ln>
-            <a:noFill/>
-          </a:ln>
-        </p:spPr>
-        <p:txBody>
-          <a:bodyPr rtlCol="0" anchor="ctr"/>
-          <a:lstStyle/>
-          <a:p>
-            <a:pPr algn="ctr"/>
-          </a:p>
-        </p:txBody>
-      </p:sp>
-      <p:sp>
-        <p:nvSpPr>
-          <p:cNvPr id="21" name="Oval 20"/>
-          <p:cNvSpPr/>
-          <p:nvPr/>
-        </p:nvSpPr>
-        <p:spPr>
-          <a:xfrm>
-            <a:off x="2894400" y="482400"/>
-            <a:ext cx="43200" cy="43200"/>
-          </a:xfrm>
-          <a:prstGeom prst="ellipse">
-            <a:avLst/>
-          </a:prstGeom>
-          <a:solidFill>
-            <a:srgbClr val="CC8DAC">
-              <a:alpha val="34000"/>
-            </a:srgbClr>
-          </a:solidFill>
-          <a:ln>
-            <a:noFill/>
-          </a:ln>
-        </p:spPr>
-        <p:txBody>
-          <a:bodyPr rtlCol="0" anchor="ctr"/>
-          <a:lstStyle/>
-          <a:p>
-            <a:pPr algn="ctr"/>
-          </a:p>
-        </p:txBody>
-      </p:sp>
-      <p:sp>
-        <p:nvSpPr>
-          <p:cNvPr id="22" name="Rectangle 21"/>
-          <p:cNvSpPr/>
-          <p:nvPr/>
-        </p:nvSpPr>
-        <p:spPr>
-          <a:xfrm>
-            <a:off x="0" y="1663200"/>
-            <a:ext cx="3240000" cy="136800"/>
-          </a:xfrm>
-          <a:prstGeom prst="rect">
-            <a:avLst/>
-          </a:prstGeom>
-          <a:solidFill>
-            <a:srgbClr val="CC8DAC"/>
-          </a:solidFill>
-          <a:ln>
-            <a:noFill/>
-          </a:ln>
-        </p:spPr>
-        <p:txBody>
-          <a:bodyPr rtlCol="0" anchor="ctr"/>
-          <a:lstStyle/>
-          <a:p>
-            <a:pPr algn="ctr"/>
-          </a:p>
-        </p:txBody>
-      </p:sp>
-      <p:sp>
-        <p:nvSpPr>
-          <p:cNvPr id="23" name="Rectangle 22"/>
-          <p:cNvSpPr/>
-          <p:nvPr/>
-        </p:nvSpPr>
-        <p:spPr>
-          <a:xfrm>
-            <a:off x="0" y="1663200"/>
-            <a:ext cx="936000" cy="136800"/>
-          </a:xfrm>
-          <a:prstGeom prst="rect">
-            <a:avLst/>
-          </a:prstGeom>
-          <a:solidFill>
-            <a:srgbClr val="905774"/>
-          </a:solidFill>
-          <a:ln>
-            <a:noFill/>
-          </a:ln>
-        </p:spPr>
-        <p:txBody>
-          <a:bodyPr rtlCol="0" anchor="ctr"/>
-          <a:lstStyle/>
-          <a:p>
-            <a:pPr algn="ctr"/>
-          </a:p>
-        </p:txBody>
-      </p:sp>
-      <p:sp>
-        <p:nvSpPr>
-          <p:cNvPr id="24" name="텍스트"/>
-          <p:cNvSpPr txBox="1"/>
-          <p:nvPr/>
-        </p:nvSpPr>
-        <p:spPr>
-          <a:xfrm>
-            <a:off x="252000" y="208800"/>
-            <a:ext cx="1800000" cy="100800"/>
+            <a:off x="252000" y="273600"/>
+            <a:ext cx="2160000" cy="360000"/>
           </a:xfrm>
           <a:prstGeom prst="rect">
             <a:avLst/>
@@ -3799,51 +3150,11 @@
           <a:p>
             <a:pPr algn="l">
               <a:lnSpc>
-                <a:spcPts val="1087"/>
+                <a:spcPts val="3190"/>
               </a:lnSpc>
             </a:pPr>
             <a:r>
-              <a:rPr sz="750" b="1" spc="150">
-                <a:solidFill>
-                  <a:srgbClr val="D1B9C5"/>
-                </a:solidFill>
-                <a:latin typeface="맑은 고딕"/>
-                <a:ea typeface="맑은 고딕"/>
-              </a:rPr>
-              <a:t>상호명</a:t>
-            </a:r>
-          </a:p>
-        </p:txBody>
-      </p:sp>
-      <p:sp>
-        <p:nvSpPr>
-          <p:cNvPr id="25" name="텍스트"/>
-          <p:cNvSpPr txBox="1"/>
-          <p:nvPr/>
-        </p:nvSpPr>
-        <p:spPr>
-          <a:xfrm>
-            <a:off x="252000" y="540000"/>
-            <a:ext cx="2016000" cy="313692"/>
-          </a:xfrm>
-          <a:prstGeom prst="rect">
-            <a:avLst/>
-          </a:prstGeom>
-          <a:noFill/>
-        </p:spPr>
-        <p:txBody>
-          <a:bodyPr wrap="square" lIns="0" rIns="0" tIns="0" bIns="0" anchor="t">
-            <a:spAutoFit/>
-          </a:bodyPr>
-          <a:lstStyle/>
-          <a:p>
-            <a:pPr algn="l">
-              <a:lnSpc>
-                <a:spcPts val="2755"/>
-              </a:lnSpc>
-            </a:pPr>
-            <a:r>
-              <a:rPr sz="1900" b="1" spc="50">
+              <a:rPr sz="2200" b="1">
                 <a:solidFill>
                   <a:srgbClr val="FFFFFF"/>
                 </a:solidFill>
@@ -3857,14 +3168,14 @@
       </p:sp>
       <p:sp>
         <p:nvSpPr>
-          <p:cNvPr id="26" name="텍스트"/>
+          <p:cNvPr id="4" name="텍스트"/>
           <p:cNvSpPr txBox="1"/>
           <p:nvPr/>
         </p:nvSpPr>
         <p:spPr>
           <a:xfrm>
-            <a:off x="252000" y="828000"/>
-            <a:ext cx="2016000" cy="122400"/>
+            <a:off x="252000" y="676800"/>
+            <a:ext cx="2160000" cy="171451"/>
           </a:xfrm>
           <a:prstGeom prst="rect">
             <a:avLst/>
@@ -3879,13 +3190,13 @@
           <a:p>
             <a:pPr algn="l">
               <a:lnSpc>
-                <a:spcPts val="1232"/>
+                <a:spcPts val="1305"/>
               </a:lnSpc>
             </a:pPr>
             <a:r>
-              <a:rPr sz="850" b="1">
+              <a:rPr sz="900" b="0">
                 <a:solidFill>
-                  <a:srgbClr val="DEB5C9"/>
+                  <a:srgbClr val="F2CEF7"/>
                 </a:solidFill>
                 <a:latin typeface="맑은 고딕"/>
                 <a:ea typeface="맑은 고딕"/>
@@ -3897,14 +3208,14 @@
       </p:sp>
       <p:sp>
         <p:nvSpPr>
-          <p:cNvPr id="27" name="텍스트"/>
+          <p:cNvPr id="5" name="텍스트"/>
           <p:cNvSpPr txBox="1"/>
           <p:nvPr/>
         </p:nvSpPr>
         <p:spPr>
           <a:xfrm>
-            <a:off x="252000" y="1108800"/>
-            <a:ext cx="122400" cy="168911"/>
+            <a:off x="1548000" y="230400"/>
+            <a:ext cx="1440000" cy="123826"/>
           </a:xfrm>
           <a:prstGeom prst="rect">
             <a:avLst/>
@@ -3917,34 +3228,55 @@
           </a:bodyPr>
           <a:lstStyle/>
           <a:p>
-            <a:pPr algn="l">
+            <a:pPr algn="r">
               <a:lnSpc>
-                <a:spcPts val="1015"/>
+                <a:spcPts val="942"/>
               </a:lnSpc>
             </a:pPr>
             <a:r>
-              <a:rPr sz="700" b="1">
+              <a:rPr sz="650" b="1" spc="200">
                 <a:solidFill>
-                  <a:srgbClr val="DEB5C9"/>
+                  <a:srgbClr val="F2CEF7"/>
                 </a:solidFill>
                 <a:latin typeface="맑은 고딕"/>
                 <a:ea typeface="맑은 고딕"/>
               </a:rPr>
-              <a:t>T</a:t>
-            </a:r>
-          </a:p>
-        </p:txBody>
-      </p:sp>
-      <p:sp>
-        <p:nvSpPr>
-          <p:cNvPr id="28" name="텍스트"/>
+              <a:t>상호명</a:t>
+            </a:r>
+          </a:p>
+        </p:txBody>
+      </p:sp>
+      <p:cxnSp>
+        <p:nvCxnSpPr>
+          <p:cNvPr id="6" name="Connector 5"/>
+          <p:cNvCxnSpPr/>
+          <p:nvPr/>
+        </p:nvCxnSpPr>
+        <p:spPr>
+          <a:xfrm>
+            <a:off x="252000" y="1051200"/>
+            <a:ext cx="2736000" cy="0"/>
+          </a:xfrm>
+          <a:prstGeom prst="line">
+            <a:avLst/>
+          </a:prstGeom>
+          <a:ln w="5760">
+            <a:solidFill>
+              <a:srgbClr val="DF8AEC"/>
+            </a:solidFill>
+          </a:ln>
+        </p:spPr>
+      </p:cxnSp>
+      <p:sp>
+        <p:nvSpPr>
+          <p:cNvPr id="7" name="텍스트"/>
           <p:cNvSpPr txBox="1"/>
           <p:nvPr/>
         </p:nvSpPr>
         <p:spPr>
           <a:xfrm>
-            <a:off x="396000" y="1108800"/>
-            <a:ext cx="1584000" cy="168911"/>
+            <a:off x="252000" y="1123200"/>
+            <a:ext cx="576000" cy="99061"/>
           </a:xfrm>
           <a:prstGeom prst="rect">
             <a:avLst/>
@@ -3959,11 +3291,51 @@
           <a:p>
             <a:pPr algn="l">
               <a:lnSpc>
-                <a:spcPts val="1015"/>
+                <a:spcPts val="754"/>
               </a:lnSpc>
             </a:pPr>
             <a:r>
-              <a:rPr sz="700" b="0">
+              <a:rPr sz="520" b="1" spc="150">
+                <a:solidFill>
+                  <a:srgbClr val="F2CEF7"/>
+                </a:solidFill>
+                <a:latin typeface="맑은 고딕"/>
+                <a:ea typeface="맑은 고딕"/>
+              </a:rPr>
+              <a:t>TEL</a:t>
+            </a:r>
+          </a:p>
+        </p:txBody>
+      </p:sp>
+      <p:sp>
+        <p:nvSpPr>
+          <p:cNvPr id="8" name="텍스트"/>
+          <p:cNvSpPr txBox="1"/>
+          <p:nvPr/>
+        </p:nvSpPr>
+        <p:spPr>
+          <a:xfrm>
+            <a:off x="900000" y="1101600"/>
+            <a:ext cx="2088000" cy="142876"/>
+          </a:xfrm>
+          <a:prstGeom prst="rect">
+            <a:avLst/>
+          </a:prstGeom>
+          <a:noFill/>
+        </p:spPr>
+        <p:txBody>
+          <a:bodyPr wrap="square" lIns="0" rIns="0" tIns="0" bIns="0" anchor="t">
+            <a:spAutoFit/>
+          </a:bodyPr>
+          <a:lstStyle/>
+          <a:p>
+            <a:pPr algn="l">
+              <a:lnSpc>
+                <a:spcPts val="1087"/>
+              </a:lnSpc>
+            </a:pPr>
+            <a:r>
+              <a:rPr sz="750" b="0">
                 <a:solidFill>
                   <a:srgbClr val="FFFFFF"/>
                 </a:solidFill>
@@ -3975,16 +3347,37 @@
           </a:p>
         </p:txBody>
       </p:sp>
-      <p:sp>
-        <p:nvSpPr>
-          <p:cNvPr id="29" name="텍스트"/>
+      <p:cxnSp>
+        <p:nvCxnSpPr>
+          <p:cNvPr id="9" name="Connector 8"/>
+          <p:cNvCxnSpPr/>
+          <p:nvPr/>
+        </p:nvCxnSpPr>
+        <p:spPr>
+          <a:xfrm>
+            <a:off x="252000" y="1274400"/>
+            <a:ext cx="2736000" cy="0"/>
+          </a:xfrm>
+          <a:prstGeom prst="line">
+            <a:avLst/>
+          </a:prstGeom>
+          <a:ln w="5760">
+            <a:solidFill>
+              <a:srgbClr val="DF8AEC"/>
+            </a:solidFill>
+          </a:ln>
+        </p:spPr>
+      </p:cxnSp>
+      <p:sp>
+        <p:nvSpPr>
+          <p:cNvPr id="10" name="텍스트"/>
           <p:cNvSpPr txBox="1"/>
           <p:nvPr/>
         </p:nvSpPr>
         <p:spPr>
           <a:xfrm>
-            <a:off x="252000" y="1277711"/>
-            <a:ext cx="122400" cy="168911"/>
+            <a:off x="252000" y="1346400"/>
+            <a:ext cx="576000" cy="99061"/>
           </a:xfrm>
           <a:prstGeom prst="rect">
             <a:avLst/>
@@ -3999,32 +3392,32 @@
           <a:p>
             <a:pPr algn="l">
               <a:lnSpc>
-                <a:spcPts val="1015"/>
+                <a:spcPts val="754"/>
               </a:lnSpc>
             </a:pPr>
             <a:r>
-              <a:rPr sz="700" b="1">
+              <a:rPr sz="520" b="1" spc="150">
                 <a:solidFill>
-                  <a:srgbClr val="DEB5C9"/>
+                  <a:srgbClr val="F2CEF7"/>
                 </a:solidFill>
                 <a:latin typeface="맑은 고딕"/>
                 <a:ea typeface="맑은 고딕"/>
               </a:rPr>
-              <a:t>E</a:t>
-            </a:r>
-          </a:p>
-        </p:txBody>
-      </p:sp>
-      <p:sp>
-        <p:nvSpPr>
-          <p:cNvPr id="30" name="텍스트"/>
+              <a:t>MAIL</a:t>
+            </a:r>
+          </a:p>
+        </p:txBody>
+      </p:sp>
+      <p:sp>
+        <p:nvSpPr>
+          <p:cNvPr id="11" name="텍스트"/>
           <p:cNvSpPr txBox="1"/>
           <p:nvPr/>
         </p:nvSpPr>
         <p:spPr>
           <a:xfrm>
-            <a:off x="396000" y="1277711"/>
-            <a:ext cx="1584000" cy="168911"/>
+            <a:off x="900000" y="1324800"/>
+            <a:ext cx="2088000" cy="142876"/>
           </a:xfrm>
           <a:prstGeom prst="rect">
             <a:avLst/>
@@ -4039,11 +3432,11 @@
           <a:p>
             <a:pPr algn="l">
               <a:lnSpc>
-                <a:spcPts val="1015"/>
+                <a:spcPts val="1087"/>
               </a:lnSpc>
             </a:pPr>
             <a:r>
-              <a:rPr sz="700" b="0">
+              <a:rPr sz="750" b="0">
                 <a:solidFill>
                   <a:srgbClr val="FFFFFF"/>
                 </a:solidFill>
@@ -4055,16 +3448,37 @@
           </a:p>
         </p:txBody>
       </p:sp>
-      <p:sp>
-        <p:nvSpPr>
-          <p:cNvPr id="31" name="텍스트"/>
+      <p:cxnSp>
+        <p:nvCxnSpPr>
+          <p:cNvPr id="12" name="Connector 11"/>
+          <p:cNvCxnSpPr/>
+          <p:nvPr/>
+        </p:nvCxnSpPr>
+        <p:spPr>
+          <a:xfrm>
+            <a:off x="252000" y="1497600"/>
+            <a:ext cx="2736000" cy="0"/>
+          </a:xfrm>
+          <a:prstGeom prst="line">
+            <a:avLst/>
+          </a:prstGeom>
+          <a:ln w="5760">
+            <a:solidFill>
+              <a:srgbClr val="DF8AEC"/>
+            </a:solidFill>
+          </a:ln>
+        </p:spPr>
+      </p:cxnSp>
+      <p:sp>
+        <p:nvSpPr>
+          <p:cNvPr id="13" name="텍스트"/>
           <p:cNvSpPr txBox="1"/>
           <p:nvPr/>
         </p:nvSpPr>
         <p:spPr>
           <a:xfrm>
-            <a:off x="252000" y="1446622"/>
-            <a:ext cx="122400" cy="168911"/>
+            <a:off x="252000" y="1569600"/>
+            <a:ext cx="576000" cy="99061"/>
           </a:xfrm>
           <a:prstGeom prst="rect">
             <a:avLst/>
@@ -4079,32 +3493,32 @@
           <a:p>
             <a:pPr algn="l">
               <a:lnSpc>
-                <a:spcPts val="1015"/>
+                <a:spcPts val="754"/>
               </a:lnSpc>
             </a:pPr>
             <a:r>
-              <a:rPr sz="700" b="1">
+              <a:rPr sz="520" b="1" spc="150">
                 <a:solidFill>
-                  <a:srgbClr val="DEB5C9"/>
+                  <a:srgbClr val="F2CEF7"/>
                 </a:solidFill>
                 <a:latin typeface="맑은 고딕"/>
                 <a:ea typeface="맑은 고딕"/>
               </a:rPr>
-              <a:t>A</a:t>
-            </a:r>
-          </a:p>
-        </p:txBody>
-      </p:sp>
-      <p:sp>
-        <p:nvSpPr>
-          <p:cNvPr id="32" name="텍스트"/>
+              <a:t>ADDR</a:t>
+            </a:r>
+          </a:p>
+        </p:txBody>
+      </p:sp>
+      <p:sp>
+        <p:nvSpPr>
+          <p:cNvPr id="14" name="텍스트"/>
           <p:cNvSpPr txBox="1"/>
           <p:nvPr/>
         </p:nvSpPr>
         <p:spPr>
           <a:xfrm>
-            <a:off x="396000" y="1446622"/>
-            <a:ext cx="1584000" cy="168911"/>
+            <a:off x="900000" y="1548000"/>
+            <a:ext cx="2088000" cy="142876"/>
           </a:xfrm>
           <a:prstGeom prst="rect">
             <a:avLst/>
@@ -4119,11 +3533,11 @@
           <a:p>
             <a:pPr algn="l">
               <a:lnSpc>
-                <a:spcPts val="1015"/>
+                <a:spcPts val="1087"/>
               </a:lnSpc>
             </a:pPr>
             <a:r>
-              <a:rPr sz="700" b="0">
+              <a:rPr sz="750" b="0">
                 <a:solidFill>
                   <a:srgbClr val="FFFFFF"/>
                 </a:solidFill>
@@ -4135,154 +3549,23 @@
           </a:p>
         </p:txBody>
       </p:sp>
-      <p:sp>
-        <p:nvSpPr>
-          <p:cNvPr id="33" name="Freeform 32"/>
-          <p:cNvSpPr/>
-          <p:nvPr/>
-        </p:nvSpPr>
-        <p:spPr>
-          <a:xfrm>
-            <a:off x="2793600" y="1159200"/>
-            <a:ext cx="172800" cy="126720"/>
-          </a:xfrm>
-          <a:custGeom>
-            <a:avLst/>
-            <a:gdLst/>
-            <a:ahLst/>
-            <a:cxnLst/>
-            <a:rect l="l" t="t" r="r" b="b"/>
-            <a:pathLst>
-              <a:path w="172800" h="126720">
-                <a:moveTo>
-                  <a:pt x="0" y="0"/>
-                </a:moveTo>
-                <a:lnTo>
-                  <a:pt x="172800" y="0"/>
-                </a:lnTo>
-                <a:lnTo>
-                  <a:pt x="155520" y="126720"/>
-                </a:lnTo>
-                <a:lnTo>
-                  <a:pt x="17280" y="126720"/>
-                </a:lnTo>
-                <a:close/>
-              </a:path>
-            </a:pathLst>
-          </a:custGeom>
-          <a:solidFill>
-            <a:srgbClr val="CC8DAC"/>
-          </a:solidFill>
-          <a:ln>
-            <a:noFill/>
-          </a:ln>
-        </p:spPr>
-        <p:txBody>
-          <a:bodyPr rtlCol="0" anchor="ctr"/>
-          <a:lstStyle/>
-          <a:p>
-            <a:pPr algn="ctr"/>
-          </a:p>
-        </p:txBody>
-      </p:sp>
-      <p:sp>
-        <p:nvSpPr>
-          <p:cNvPr id="34" name="Oval 33"/>
-          <p:cNvSpPr/>
-          <p:nvPr/>
-        </p:nvSpPr>
-        <p:spPr>
-          <a:xfrm>
-            <a:off x="2943360" y="1170720"/>
-            <a:ext cx="80640" cy="80640"/>
-          </a:xfrm>
-          <a:prstGeom prst="ellipse">
-            <a:avLst/>
-          </a:prstGeom>
-          <a:noFill/>
-          <a:ln w="17280">
-            <a:solidFill>
-              <a:srgbClr val="CC8DAC"/>
-            </a:solidFill>
-          </a:ln>
-        </p:spPr>
-        <p:txBody>
-          <a:bodyPr rtlCol="0" anchor="ctr"/>
-          <a:lstStyle/>
-          <a:p>
-            <a:pPr algn="ctr"/>
-          </a:p>
-        </p:txBody>
-      </p:sp>
-      <p:sp>
-        <p:nvSpPr>
-          <p:cNvPr id="35" name="Rounded Rectangle 34"/>
-          <p:cNvSpPr/>
-          <p:nvPr/>
-        </p:nvSpPr>
-        <p:spPr>
-          <a:xfrm>
-            <a:off x="2759040" y="1291680"/>
-            <a:ext cx="241920" cy="20160"/>
-          </a:xfrm>
-          <a:prstGeom prst="roundRect">
-            <a:avLst>
-              <a:gd name="adj" fmla="val 42857"/>
-            </a:avLst>
-          </a:prstGeom>
-          <a:solidFill>
-            <a:srgbClr val="905774"/>
-          </a:solidFill>
-          <a:ln>
-            <a:noFill/>
-          </a:ln>
-        </p:spPr>
-        <p:txBody>
-          <a:bodyPr rtlCol="0" anchor="ctr"/>
-          <a:lstStyle/>
-          <a:p>
-            <a:pPr algn="ctr"/>
-          </a:p>
-        </p:txBody>
-      </p:sp>
       <p:cxnSp>
         <p:nvCxnSpPr>
-          <p:cNvPr id="36" name="Connector 35"/>
+          <p:cNvPr id="15" name="Connector 14"/>
           <p:cNvCxnSpPr/>
           <p:nvPr/>
         </p:nvCxnSpPr>
         <p:spPr>
-          <a:xfrm flipV="1">
-            <a:off x="2851200" y="1084320"/>
-            <a:ext cx="11520" cy="46080"/>
+          <a:xfrm>
+            <a:off x="252000" y="1720800"/>
+            <a:ext cx="2736000" cy="0"/>
           </a:xfrm>
           <a:prstGeom prst="line">
             <a:avLst/>
           </a:prstGeom>
-          <a:ln w="14400">
+          <a:ln w="5760">
             <a:solidFill>
-              <a:srgbClr val="905774"/>
-            </a:solidFill>
-          </a:ln>
-        </p:spPr>
-      </p:cxnSp>
-      <p:cxnSp>
-        <p:nvCxnSpPr>
-          <p:cNvPr id="37" name="Connector 36"/>
-          <p:cNvCxnSpPr/>
-          <p:nvPr/>
-        </p:nvCxnSpPr>
-        <p:spPr>
-          <a:xfrm flipV="1">
-            <a:off x="2903040" y="1084320"/>
-            <a:ext cx="11520" cy="46080"/>
-          </a:xfrm>
-          <a:prstGeom prst="line">
-            <a:avLst/>
-          </a:prstGeom>
-          <a:ln w="14400">
-            <a:solidFill>
-              <a:srgbClr val="905774"/>
+              <a:srgbClr val="DF8AEC"/>
             </a:solidFill>
           </a:ln>
         </p:spPr>
@@ -4301,7 +3584,7 @@
     <p:bg>
       <p:bgPr>
         <a:solidFill>
-          <a:srgbClr val="F9F1F5"/>
+          <a:srgbClr val="FFFFFF"/>
         </a:solidFill>
         <a:effectLst/>
       </p:bgPr>
@@ -4315,77 +3598,20 @@
       <p:grpSpPr/>
       <p:sp>
         <p:nvSpPr>
-          <p:cNvPr id="2" name="Freeform 1"/>
+          <p:cNvPr id="2" name="Rectangle 1"/>
           <p:cNvSpPr/>
           <p:nvPr/>
         </p:nvSpPr>
         <p:spPr>
           <a:xfrm>
-            <a:off x="2016000" y="576000"/>
-            <a:ext cx="1224000" cy="1224000"/>
+            <a:off x="252000" y="540000"/>
+            <a:ext cx="28800" cy="720000"/>
           </a:xfrm>
-          <a:custGeom>
+          <a:prstGeom prst="rect">
             <a:avLst/>
-            <a:gdLst/>
-            <a:ahLst/>
-            <a:cxnLst/>
-            <a:rect l="l" t="t" r="r" b="b"/>
-            <a:pathLst>
-              <a:path w="1224000" h="1224000">
-                <a:moveTo>
-                  <a:pt x="1224000" y="1224000"/>
-                </a:moveTo>
-                <a:lnTo>
-                  <a:pt x="0" y="1224000"/>
-                </a:lnTo>
-                <a:lnTo>
-                  <a:pt x="7696" y="1086955"/>
-                </a:lnTo>
-                <a:lnTo>
-                  <a:pt x="30688" y="951634"/>
-                </a:lnTo>
-                <a:lnTo>
-                  <a:pt x="68687" y="819738"/>
-                </a:lnTo>
-                <a:lnTo>
-                  <a:pt x="121214" y="692926"/>
-                </a:lnTo>
-                <a:lnTo>
-                  <a:pt x="187610" y="572793"/>
-                </a:lnTo>
-                <a:lnTo>
-                  <a:pt x="267038" y="460848"/>
-                </a:lnTo>
-                <a:lnTo>
-                  <a:pt x="358501" y="358501"/>
-                </a:lnTo>
-                <a:lnTo>
-                  <a:pt x="460848" y="267038"/>
-                </a:lnTo>
-                <a:lnTo>
-                  <a:pt x="572793" y="187610"/>
-                </a:lnTo>
-                <a:lnTo>
-                  <a:pt x="692926" y="121214"/>
-                </a:lnTo>
-                <a:lnTo>
-                  <a:pt x="819738" y="68687"/>
-                </a:lnTo>
-                <a:lnTo>
-                  <a:pt x="951634" y="30688"/>
-                </a:lnTo>
-                <a:lnTo>
-                  <a:pt x="1086955" y="7696"/>
-                </a:lnTo>
-                <a:lnTo>
-                  <a:pt x="1224000" y="0"/>
-                </a:lnTo>
-                <a:close/>
-              </a:path>
-            </a:pathLst>
-          </a:custGeom>
+          </a:prstGeom>
           <a:solidFill>
-            <a:srgbClr val="B8618C"/>
+            <a:srgbClr val="C93CE0"/>
           </a:solidFill>
           <a:ln>
             <a:noFill/>
@@ -4401,252 +3627,14 @@
       </p:sp>
       <p:sp>
         <p:nvSpPr>
-          <p:cNvPr id="3" name="Freeform 2"/>
-          <p:cNvSpPr/>
+          <p:cNvPr id="3" name="텍스트"/>
+          <p:cNvSpPr txBox="1"/>
           <p:nvPr/>
         </p:nvSpPr>
         <p:spPr>
           <a:xfrm>
-            <a:off x="2520000" y="1080000"/>
-            <a:ext cx="720000" cy="720000"/>
-          </a:xfrm>
-          <a:custGeom>
-            <a:avLst/>
-            <a:gdLst/>
-            <a:ahLst/>
-            <a:cxnLst/>
-            <a:rect l="l" t="t" r="r" b="b"/>
-            <a:pathLst>
-              <a:path w="720000" h="720000">
-                <a:moveTo>
-                  <a:pt x="720000" y="720000"/>
-                </a:moveTo>
-                <a:lnTo>
-                  <a:pt x="0" y="720000"/>
-                </a:lnTo>
-                <a:lnTo>
-                  <a:pt x="4527" y="639386"/>
-                </a:lnTo>
-                <a:lnTo>
-                  <a:pt x="18052" y="559785"/>
-                </a:lnTo>
-                <a:lnTo>
-                  <a:pt x="40404" y="482199"/>
-                </a:lnTo>
-                <a:lnTo>
-                  <a:pt x="71302" y="407604"/>
-                </a:lnTo>
-                <a:lnTo>
-                  <a:pt x="110359" y="336937"/>
-                </a:lnTo>
-                <a:lnTo>
-                  <a:pt x="157081" y="271087"/>
-                </a:lnTo>
-                <a:lnTo>
-                  <a:pt x="210883" y="210883"/>
-                </a:lnTo>
-                <a:lnTo>
-                  <a:pt x="271087" y="157081"/>
-                </a:lnTo>
-                <a:lnTo>
-                  <a:pt x="336937" y="110359"/>
-                </a:lnTo>
-                <a:lnTo>
-                  <a:pt x="407604" y="71302"/>
-                </a:lnTo>
-                <a:lnTo>
-                  <a:pt x="482199" y="40404"/>
-                </a:lnTo>
-                <a:lnTo>
-                  <a:pt x="559785" y="18052"/>
-                </a:lnTo>
-                <a:lnTo>
-                  <a:pt x="639386" y="4527"/>
-                </a:lnTo>
-                <a:lnTo>
-                  <a:pt x="720000" y="0"/>
-                </a:lnTo>
-                <a:close/>
-              </a:path>
-            </a:pathLst>
-          </a:custGeom>
-          <a:solidFill>
-            <a:srgbClr val="F3E0E9"/>
-          </a:solidFill>
-          <a:ln>
-            <a:noFill/>
-          </a:ln>
-        </p:spPr>
-        <p:txBody>
-          <a:bodyPr rtlCol="0" anchor="ctr"/>
-          <a:lstStyle/>
-          <a:p>
-            <a:pPr algn="ctr"/>
-          </a:p>
-        </p:txBody>
-      </p:sp>
-      <p:sp>
-        <p:nvSpPr>
-          <p:cNvPr id="4" name="Freeform 3"/>
-          <p:cNvSpPr/>
-          <p:nvPr/>
-        </p:nvSpPr>
-        <p:spPr>
-          <a:xfrm>
-            <a:off x="2804400" y="1450800"/>
-            <a:ext cx="151200" cy="110880"/>
-          </a:xfrm>
-          <a:custGeom>
-            <a:avLst/>
-            <a:gdLst/>
-            <a:ahLst/>
-            <a:cxnLst/>
-            <a:rect l="l" t="t" r="r" b="b"/>
-            <a:pathLst>
-              <a:path w="151200" h="110880">
-                <a:moveTo>
-                  <a:pt x="0" y="0"/>
-                </a:moveTo>
-                <a:lnTo>
-                  <a:pt x="151200" y="0"/>
-                </a:lnTo>
-                <a:lnTo>
-                  <a:pt x="136080" y="110880"/>
-                </a:lnTo>
-                <a:lnTo>
-                  <a:pt x="15120" y="110880"/>
-                </a:lnTo>
-                <a:close/>
-              </a:path>
-            </a:pathLst>
-          </a:custGeom>
-          <a:solidFill>
-            <a:srgbClr val="FFFFFF"/>
-          </a:solidFill>
-          <a:ln>
-            <a:noFill/>
-          </a:ln>
-        </p:spPr>
-        <p:txBody>
-          <a:bodyPr rtlCol="0" anchor="ctr"/>
-          <a:lstStyle/>
-          <a:p>
-            <a:pPr algn="ctr"/>
-          </a:p>
-        </p:txBody>
-      </p:sp>
-      <p:sp>
-        <p:nvSpPr>
-          <p:cNvPr id="5" name="Oval 4"/>
-          <p:cNvSpPr/>
-          <p:nvPr/>
-        </p:nvSpPr>
-        <p:spPr>
-          <a:xfrm>
-            <a:off x="2935440" y="1460880"/>
-            <a:ext cx="70560" cy="70560"/>
-          </a:xfrm>
-          <a:prstGeom prst="ellipse">
-            <a:avLst/>
-          </a:prstGeom>
-          <a:noFill/>
-          <a:ln w="15120">
-            <a:solidFill>
-              <a:srgbClr val="FFFFFF"/>
-            </a:solidFill>
-          </a:ln>
-        </p:spPr>
-        <p:txBody>
-          <a:bodyPr rtlCol="0" anchor="ctr"/>
-          <a:lstStyle/>
-          <a:p>
-            <a:pPr algn="ctr"/>
-          </a:p>
-        </p:txBody>
-      </p:sp>
-      <p:sp>
-        <p:nvSpPr>
-          <p:cNvPr id="6" name="Rounded Rectangle 5"/>
-          <p:cNvSpPr/>
-          <p:nvPr/>
-        </p:nvSpPr>
-        <p:spPr>
-          <a:xfrm>
-            <a:off x="2774160" y="1566720"/>
-            <a:ext cx="211680" cy="17640"/>
-          </a:xfrm>
-          <a:prstGeom prst="roundRect">
-            <a:avLst>
-              <a:gd name="adj" fmla="val 42857"/>
-            </a:avLst>
-          </a:prstGeom>
-          <a:solidFill>
-            <a:srgbClr val="808080"/>
-          </a:solidFill>
-          <a:ln>
-            <a:noFill/>
-          </a:ln>
-        </p:spPr>
-        <p:txBody>
-          <a:bodyPr rtlCol="0" anchor="ctr"/>
-          <a:lstStyle/>
-          <a:p>
-            <a:pPr algn="ctr"/>
-          </a:p>
-        </p:txBody>
-      </p:sp>
-      <p:cxnSp>
-        <p:nvCxnSpPr>
-          <p:cNvPr id="7" name="Connector 6"/>
-          <p:cNvCxnSpPr/>
-          <p:nvPr/>
-        </p:nvCxnSpPr>
-        <p:spPr>
-          <a:xfrm flipV="1">
-            <a:off x="2854800" y="1385280"/>
-            <a:ext cx="10080" cy="40320"/>
-          </a:xfrm>
-          <a:prstGeom prst="line">
-            <a:avLst/>
-          </a:prstGeom>
-          <a:ln w="12600">
-            <a:solidFill>
-              <a:srgbClr val="808080"/>
-            </a:solidFill>
-          </a:ln>
-        </p:spPr>
-      </p:cxnSp>
-      <p:cxnSp>
-        <p:nvCxnSpPr>
-          <p:cNvPr id="8" name="Connector 7"/>
-          <p:cNvCxnSpPr/>
-          <p:nvPr/>
-        </p:nvCxnSpPr>
-        <p:spPr>
-          <a:xfrm flipV="1">
-            <a:off x="2900160" y="1385280"/>
-            <a:ext cx="10080" cy="40320"/>
-          </a:xfrm>
-          <a:prstGeom prst="line">
-            <a:avLst/>
-          </a:prstGeom>
-          <a:ln w="12600">
-            <a:solidFill>
-              <a:srgbClr val="808080"/>
-            </a:solidFill>
-          </a:ln>
-        </p:spPr>
-      </p:cxnSp>
-      <p:sp>
-        <p:nvSpPr>
-          <p:cNvPr id="9" name="텍스트"/>
-          <p:cNvSpPr txBox="1"/>
-          <p:nvPr/>
-        </p:nvSpPr>
-        <p:spPr>
-          <a:xfrm>
-            <a:off x="252000" y="324000"/>
-            <a:ext cx="1944000" cy="720000"/>
+            <a:off x="424800" y="612000"/>
+            <a:ext cx="2160000" cy="648000"/>
           </a:xfrm>
           <a:prstGeom prst="rect">
             <a:avLst/>
@@ -4661,13 +3649,13 @@
           <a:p>
             <a:pPr algn="l">
               <a:lnSpc>
-                <a:spcPts val="1739"/>
+                <a:spcPts val="1812"/>
               </a:lnSpc>
             </a:pPr>
             <a:r>
-              <a:rPr sz="1200" b="1">
+              <a:rPr sz="1250" b="1">
                 <a:solidFill>
-                  <a:srgbClr val="7B3759"/>
+                  <a:srgbClr val="12151C"/>
                 </a:solidFill>
                 <a:latin typeface="맑은 고딕"/>
                 <a:ea typeface="맑은 고딕"/>
@@ -4679,14 +3667,14 @@
       </p:sp>
       <p:sp>
         <p:nvSpPr>
-          <p:cNvPr id="10" name="텍스트"/>
+          <p:cNvPr id="4" name="텍스트"/>
           <p:cNvSpPr txBox="1"/>
           <p:nvPr/>
         </p:nvSpPr>
         <p:spPr>
           <a:xfrm>
-            <a:off x="252000" y="1476000"/>
-            <a:ext cx="1440000" cy="108000"/>
+            <a:off x="424800" y="1512000"/>
+            <a:ext cx="1800000" cy="123826"/>
           </a:xfrm>
           <a:prstGeom prst="rect">
             <a:avLst/>
@@ -4701,13 +3689,13 @@
           <a:p>
             <a:pPr algn="l">
               <a:lnSpc>
-                <a:spcPts val="1087"/>
+                <a:spcPts val="942"/>
               </a:lnSpc>
             </a:pPr>
             <a:r>
-              <a:rPr sz="750" b="1" spc="200">
+              <a:rPr sz="650" b="1" spc="200">
                 <a:solidFill>
-                  <a:srgbClr val="866073"/>
+                  <a:srgbClr val="6B7280"/>
                 </a:solidFill>
                 <a:latin typeface="맑은 고딕"/>
                 <a:ea typeface="맑은 고딕"/>

--- a/public/fun/cards/food/food-20.pptx
+++ b/public/fun/cards/food/food-20.pptx
@@ -3105,8 +3105,8 @@
         </p:nvSpPr>
         <p:spPr>
           <a:xfrm>
-            <a:off x="252000" y="144000"/>
-            <a:ext cx="201600" cy="21600"/>
+            <a:off x="0" y="0"/>
+            <a:ext cx="3240000" cy="36000"/>
           </a:xfrm>
           <a:prstGeom prst="rect">
             <a:avLst/>
@@ -3134,8 +3134,8 @@
         </p:nvSpPr>
         <p:spPr>
           <a:xfrm>
-            <a:off x="252000" y="273600"/>
-            <a:ext cx="2160000" cy="360000"/>
+            <a:off x="252000" y="223200"/>
+            <a:ext cx="1296000" cy="237600"/>
           </a:xfrm>
           <a:prstGeom prst="rect">
             <a:avLst/>
@@ -3150,11 +3150,11 @@
           <a:p>
             <a:pPr algn="l">
               <a:lnSpc>
-                <a:spcPts val="3190"/>
+                <a:spcPts val="1957"/>
               </a:lnSpc>
             </a:pPr>
             <a:r>
-              <a:rPr sz="2200" b="1">
+              <a:rPr sz="1350" b="1" spc="120">
                 <a:solidFill>
                   <a:srgbClr val="FFFFFF"/>
                 </a:solidFill>
@@ -3174,8 +3174,8 @@
         </p:nvSpPr>
         <p:spPr>
           <a:xfrm>
-            <a:off x="252000" y="676800"/>
-            <a:ext cx="2160000" cy="171451"/>
+            <a:off x="252000" y="475200"/>
+            <a:ext cx="1296000" cy="133351"/>
           </a:xfrm>
           <a:prstGeom prst="rect">
             <a:avLst/>
@@ -3190,11 +3190,11 @@
           <a:p>
             <a:pPr algn="l">
               <a:lnSpc>
-                <a:spcPts val="1305"/>
+                <a:spcPts val="1015"/>
               </a:lnSpc>
             </a:pPr>
             <a:r>
-              <a:rPr sz="900" b="0">
+              <a:rPr sz="700" b="0">
                 <a:solidFill>
                   <a:srgbClr val="F2CEF7"/>
                 </a:solidFill>
@@ -3214,7 +3214,7 @@
         </p:nvSpPr>
         <p:spPr>
           <a:xfrm>
-            <a:off x="1548000" y="230400"/>
+            <a:off x="1548000" y="259200"/>
             <a:ext cx="1440000" cy="123826"/>
           </a:xfrm>
           <a:prstGeom prst="rect">
@@ -3234,7 +3234,7 @@
               </a:lnSpc>
             </a:pPr>
             <a:r>
-              <a:rPr sz="650" b="1" spc="200">
+              <a:rPr sz="650" b="1" spc="220">
                 <a:solidFill>
                   <a:srgbClr val="F2CEF7"/>
                 </a:solidFill>
@@ -3254,13 +3254,13 @@
         </p:nvCxnSpPr>
         <p:spPr>
           <a:xfrm>
-            <a:off x="252000" y="1051200"/>
+            <a:off x="252000" y="907200"/>
             <a:ext cx="2736000" cy="0"/>
           </a:xfrm>
           <a:prstGeom prst="line">
             <a:avLst/>
           </a:prstGeom>
-          <a:ln w="5760">
+          <a:ln w="3600">
             <a:solidFill>
               <a:srgbClr val="DF8AEC"/>
             </a:solidFill>
@@ -3275,8 +3275,8 @@
         </p:nvSpPr>
         <p:spPr>
           <a:xfrm>
-            <a:off x="252000" y="1123200"/>
-            <a:ext cx="576000" cy="99061"/>
+            <a:off x="252000" y="986400"/>
+            <a:ext cx="576000" cy="91441"/>
           </a:xfrm>
           <a:prstGeom prst="rect">
             <a:avLst/>
@@ -3291,11 +3291,11 @@
           <a:p>
             <a:pPr algn="l">
               <a:lnSpc>
-                <a:spcPts val="754"/>
+                <a:spcPts val="696"/>
               </a:lnSpc>
             </a:pPr>
             <a:r>
-              <a:rPr sz="520" b="1" spc="150">
+              <a:rPr sz="480" b="1" spc="160">
                 <a:solidFill>
                   <a:srgbClr val="F2CEF7"/>
                 </a:solidFill>
@@ -3315,8 +3315,8 @@
         </p:nvSpPr>
         <p:spPr>
           <a:xfrm>
-            <a:off x="900000" y="1101600"/>
-            <a:ext cx="2088000" cy="142876"/>
+            <a:off x="936000" y="968400"/>
+            <a:ext cx="2052000" cy="133351"/>
           </a:xfrm>
           <a:prstGeom prst="rect">
             <a:avLst/>
@@ -3331,11 +3331,11 @@
           <a:p>
             <a:pPr algn="l">
               <a:lnSpc>
-                <a:spcPts val="1087"/>
+                <a:spcPts val="1015"/>
               </a:lnSpc>
             </a:pPr>
             <a:r>
-              <a:rPr sz="750" b="0">
+              <a:rPr sz="700" b="0">
                 <a:solidFill>
                   <a:srgbClr val="FFFFFF"/>
                 </a:solidFill>
@@ -3355,13 +3355,13 @@
         </p:nvCxnSpPr>
         <p:spPr>
           <a:xfrm>
-            <a:off x="252000" y="1274400"/>
+            <a:off x="252000" y="1137600"/>
             <a:ext cx="2736000" cy="0"/>
           </a:xfrm>
           <a:prstGeom prst="line">
             <a:avLst/>
           </a:prstGeom>
-          <a:ln w="5760">
+          <a:ln w="3600">
             <a:solidFill>
               <a:srgbClr val="DF8AEC"/>
             </a:solidFill>
@@ -3376,8 +3376,8 @@
         </p:nvSpPr>
         <p:spPr>
           <a:xfrm>
-            <a:off x="252000" y="1346400"/>
-            <a:ext cx="576000" cy="99061"/>
+            <a:off x="252000" y="1216800"/>
+            <a:ext cx="576000" cy="91441"/>
           </a:xfrm>
           <a:prstGeom prst="rect">
             <a:avLst/>
@@ -3392,11 +3392,11 @@
           <a:p>
             <a:pPr algn="l">
               <a:lnSpc>
-                <a:spcPts val="754"/>
+                <a:spcPts val="696"/>
               </a:lnSpc>
             </a:pPr>
             <a:r>
-              <a:rPr sz="520" b="1" spc="150">
+              <a:rPr sz="480" b="1" spc="160">
                 <a:solidFill>
                   <a:srgbClr val="F2CEF7"/>
                 </a:solidFill>
@@ -3416,8 +3416,8 @@
         </p:nvSpPr>
         <p:spPr>
           <a:xfrm>
-            <a:off x="900000" y="1324800"/>
-            <a:ext cx="2088000" cy="142876"/>
+            <a:off x="936000" y="1198800"/>
+            <a:ext cx="2052000" cy="133351"/>
           </a:xfrm>
           <a:prstGeom prst="rect">
             <a:avLst/>
@@ -3432,11 +3432,11 @@
           <a:p>
             <a:pPr algn="l">
               <a:lnSpc>
-                <a:spcPts val="1087"/>
+                <a:spcPts val="1015"/>
               </a:lnSpc>
             </a:pPr>
             <a:r>
-              <a:rPr sz="750" b="0">
+              <a:rPr sz="700" b="0">
                 <a:solidFill>
                   <a:srgbClr val="FFFFFF"/>
                 </a:solidFill>
@@ -3456,13 +3456,13 @@
         </p:nvCxnSpPr>
         <p:spPr>
           <a:xfrm>
-            <a:off x="252000" y="1497600"/>
+            <a:off x="252000" y="1368000"/>
             <a:ext cx="2736000" cy="0"/>
           </a:xfrm>
           <a:prstGeom prst="line">
             <a:avLst/>
           </a:prstGeom>
-          <a:ln w="5760">
+          <a:ln w="3600">
             <a:solidFill>
               <a:srgbClr val="DF8AEC"/>
             </a:solidFill>
@@ -3477,8 +3477,8 @@
         </p:nvSpPr>
         <p:spPr>
           <a:xfrm>
-            <a:off x="252000" y="1569600"/>
-            <a:ext cx="576000" cy="99061"/>
+            <a:off x="252000" y="1447200"/>
+            <a:ext cx="576000" cy="91441"/>
           </a:xfrm>
           <a:prstGeom prst="rect">
             <a:avLst/>
@@ -3493,11 +3493,11 @@
           <a:p>
             <a:pPr algn="l">
               <a:lnSpc>
-                <a:spcPts val="754"/>
+                <a:spcPts val="696"/>
               </a:lnSpc>
             </a:pPr>
             <a:r>
-              <a:rPr sz="520" b="1" spc="150">
+              <a:rPr sz="480" b="1" spc="160">
                 <a:solidFill>
                   <a:srgbClr val="F2CEF7"/>
                 </a:solidFill>
@@ -3517,8 +3517,8 @@
         </p:nvSpPr>
         <p:spPr>
           <a:xfrm>
-            <a:off x="900000" y="1548000"/>
-            <a:ext cx="2088000" cy="142876"/>
+            <a:off x="936000" y="1429200"/>
+            <a:ext cx="2052000" cy="133351"/>
           </a:xfrm>
           <a:prstGeom prst="rect">
             <a:avLst/>
@@ -3533,11 +3533,11 @@
           <a:p>
             <a:pPr algn="l">
               <a:lnSpc>
-                <a:spcPts val="1087"/>
+                <a:spcPts val="1015"/>
               </a:lnSpc>
             </a:pPr>
             <a:r>
-              <a:rPr sz="750" b="0">
+              <a:rPr sz="700" b="0">
                 <a:solidFill>
                   <a:srgbClr val="FFFFFF"/>
                 </a:solidFill>
@@ -3557,13 +3557,13 @@
         </p:nvCxnSpPr>
         <p:spPr>
           <a:xfrm>
-            <a:off x="252000" y="1720800"/>
+            <a:off x="252000" y="1598400"/>
             <a:ext cx="2736000" cy="0"/>
           </a:xfrm>
           <a:prstGeom prst="line">
             <a:avLst/>
           </a:prstGeom>
-          <a:ln w="5760">
+          <a:ln w="3600">
             <a:solidFill>
               <a:srgbClr val="DF8AEC"/>
             </a:solidFill>
@@ -3598,43 +3598,14 @@
       <p:grpSpPr/>
       <p:sp>
         <p:nvSpPr>
-          <p:cNvPr id="2" name="Rectangle 1"/>
-          <p:cNvSpPr/>
-          <p:nvPr/>
-        </p:nvSpPr>
-        <p:spPr>
-          <a:xfrm>
-            <a:off x="252000" y="540000"/>
-            <a:ext cx="28800" cy="720000"/>
-          </a:xfrm>
-          <a:prstGeom prst="rect">
-            <a:avLst/>
-          </a:prstGeom>
-          <a:solidFill>
-            <a:srgbClr val="C93CE0"/>
-          </a:solidFill>
-          <a:ln>
-            <a:noFill/>
-          </a:ln>
-        </p:spPr>
-        <p:txBody>
-          <a:bodyPr rtlCol="0" anchor="ctr"/>
-          <a:lstStyle/>
-          <a:p>
-            <a:pPr algn="ctr"/>
-          </a:p>
-        </p:txBody>
-      </p:sp>
-      <p:sp>
-        <p:nvSpPr>
-          <p:cNvPr id="3" name="텍스트"/>
+          <p:cNvPr id="2" name="텍스트"/>
           <p:cNvSpPr txBox="1"/>
           <p:nvPr/>
         </p:nvSpPr>
         <p:spPr>
           <a:xfrm>
-            <a:off x="424800" y="612000"/>
-            <a:ext cx="2160000" cy="648000"/>
+            <a:off x="252000" y="223200"/>
+            <a:ext cx="1080000" cy="99061"/>
           </a:xfrm>
           <a:prstGeom prst="rect">
             <a:avLst/>
@@ -3649,32 +3620,154 @@
           <a:p>
             <a:pPr algn="l">
               <a:lnSpc>
-                <a:spcPts val="1812"/>
+                <a:spcPts val="754"/>
               </a:lnSpc>
             </a:pPr>
             <a:r>
-              <a:rPr sz="1250" b="1">
+              <a:rPr sz="520" b="1" spc="240">
+                <a:solidFill>
+                  <a:srgbClr val="6B7280"/>
+                </a:solidFill>
+                <a:latin typeface="맑은 고딕"/>
+                <a:ea typeface="맑은 고딕"/>
+              </a:rPr>
+              <a:t>대표 메뉴</a:t>
+            </a:r>
+          </a:p>
+        </p:txBody>
+      </p:sp>
+      <p:cxnSp>
+        <p:nvCxnSpPr>
+          <p:cNvPr id="3" name="Connector 2"/>
+          <p:cNvCxnSpPr/>
+          <p:nvPr/>
+        </p:nvCxnSpPr>
+        <p:spPr>
+          <a:xfrm>
+            <a:off x="252000" y="388800"/>
+            <a:ext cx="2736000" cy="0"/>
+          </a:xfrm>
+          <a:prstGeom prst="line">
+            <a:avLst/>
+          </a:prstGeom>
+          <a:ln w="3600">
+            <a:solidFill>
+              <a:srgbClr val="E3E5E9"/>
+            </a:solidFill>
+          </a:ln>
+        </p:spPr>
+      </p:cxnSp>
+      <p:sp>
+        <p:nvSpPr>
+          <p:cNvPr id="4" name="텍스트"/>
+          <p:cNvSpPr txBox="1"/>
+          <p:nvPr/>
+        </p:nvSpPr>
+        <p:spPr>
+          <a:xfrm>
+            <a:off x="252000" y="468000"/>
+            <a:ext cx="216000" cy="99061"/>
+          </a:xfrm>
+          <a:prstGeom prst="rect">
+            <a:avLst/>
+          </a:prstGeom>
+          <a:noFill/>
+        </p:spPr>
+        <p:txBody>
+          <a:bodyPr wrap="square" lIns="0" rIns="0" tIns="0" bIns="0" anchor="t">
+            <a:spAutoFit/>
+          </a:bodyPr>
+          <a:lstStyle/>
+          <a:p>
+            <a:pPr algn="l">
+              <a:lnSpc>
+                <a:spcPts val="754"/>
+              </a:lnSpc>
+            </a:pPr>
+            <a:r>
+              <a:rPr sz="520" b="1" spc="100">
+                <a:solidFill>
+                  <a:srgbClr val="C93CE0"/>
+                </a:solidFill>
+                <a:latin typeface="맑은 고딕"/>
+                <a:ea typeface="맑은 고딕"/>
+              </a:rPr>
+              <a:t>01</a:t>
+            </a:r>
+          </a:p>
+        </p:txBody>
+      </p:sp>
+      <p:sp>
+        <p:nvSpPr>
+          <p:cNvPr id="5" name="텍스트"/>
+          <p:cNvSpPr txBox="1"/>
+          <p:nvPr/>
+        </p:nvSpPr>
+        <p:spPr>
+          <a:xfrm>
+            <a:off x="475200" y="457200"/>
+            <a:ext cx="1152000" cy="140971"/>
+          </a:xfrm>
+          <a:prstGeom prst="rect">
+            <a:avLst/>
+          </a:prstGeom>
+          <a:noFill/>
+        </p:spPr>
+        <p:txBody>
+          <a:bodyPr wrap="square" lIns="0" rIns="0" tIns="0" bIns="0" anchor="t">
+            <a:spAutoFit/>
+          </a:bodyPr>
+          <a:lstStyle/>
+          <a:p>
+            <a:pPr algn="l">
+              <a:lnSpc>
+                <a:spcPts val="1073"/>
+              </a:lnSpc>
+            </a:pPr>
+            <a:r>
+              <a:rPr sz="740" b="0">
                 <a:solidFill>
                   <a:srgbClr val="12151C"/>
                 </a:solidFill>
                 <a:latin typeface="맑은 고딕"/>
                 <a:ea typeface="맑은 고딕"/>
               </a:rPr>
-              <a:t>손으로 빚은 정직한 맛</a:t>
-            </a:r>
-          </a:p>
-        </p:txBody>
-      </p:sp>
-      <p:sp>
-        <p:nvSpPr>
-          <p:cNvPr id="4" name="텍스트"/>
+              <a:t>아메리카노</a:t>
+            </a:r>
+          </a:p>
+        </p:txBody>
+      </p:sp>
+      <p:cxnSp>
+        <p:nvCxnSpPr>
+          <p:cNvPr id="6" name="Connector 5"/>
+          <p:cNvCxnSpPr/>
+          <p:nvPr/>
+        </p:nvCxnSpPr>
+        <p:spPr>
+          <a:xfrm>
+            <a:off x="252000" y="691200"/>
+            <a:ext cx="1296000" cy="0"/>
+          </a:xfrm>
+          <a:prstGeom prst="line">
+            <a:avLst/>
+          </a:prstGeom>
+          <a:ln w="3600">
+            <a:solidFill>
+              <a:srgbClr val="E3E5E9"/>
+            </a:solidFill>
+          </a:ln>
+        </p:spPr>
+      </p:cxnSp>
+      <p:sp>
+        <p:nvSpPr>
+          <p:cNvPr id="7" name="텍스트"/>
           <p:cNvSpPr txBox="1"/>
           <p:nvPr/>
         </p:nvSpPr>
         <p:spPr>
           <a:xfrm>
-            <a:off x="424800" y="1512000"/>
-            <a:ext cx="1800000" cy="123826"/>
+            <a:off x="1656000" y="468000"/>
+            <a:ext cx="216000" cy="99061"/>
           </a:xfrm>
           <a:prstGeom prst="rect">
             <a:avLst/>
@@ -3689,18 +3782,260 @@
           <a:p>
             <a:pPr algn="l">
               <a:lnSpc>
-                <a:spcPts val="942"/>
+                <a:spcPts val="754"/>
               </a:lnSpc>
             </a:pPr>
             <a:r>
-              <a:rPr sz="650" b="1" spc="200">
+              <a:rPr sz="520" b="1" spc="100">
+                <a:solidFill>
+                  <a:srgbClr val="C93CE0"/>
+                </a:solidFill>
+                <a:latin typeface="맑은 고딕"/>
+                <a:ea typeface="맑은 고딕"/>
+              </a:rPr>
+              <a:t>02</a:t>
+            </a:r>
+          </a:p>
+        </p:txBody>
+      </p:sp>
+      <p:sp>
+        <p:nvSpPr>
+          <p:cNvPr id="8" name="텍스트"/>
+          <p:cNvSpPr txBox="1"/>
+          <p:nvPr/>
+        </p:nvSpPr>
+        <p:spPr>
+          <a:xfrm>
+            <a:off x="1879200" y="457200"/>
+            <a:ext cx="1152000" cy="140971"/>
+          </a:xfrm>
+          <a:prstGeom prst="rect">
+            <a:avLst/>
+          </a:prstGeom>
+          <a:noFill/>
+        </p:spPr>
+        <p:txBody>
+          <a:bodyPr wrap="square" lIns="0" rIns="0" tIns="0" bIns="0" anchor="t">
+            <a:spAutoFit/>
+          </a:bodyPr>
+          <a:lstStyle/>
+          <a:p>
+            <a:pPr algn="l">
+              <a:lnSpc>
+                <a:spcPts val="1073"/>
+              </a:lnSpc>
+            </a:pPr>
+            <a:r>
+              <a:rPr sz="740" b="0">
+                <a:solidFill>
+                  <a:srgbClr val="12151C"/>
+                </a:solidFill>
+                <a:latin typeface="맑은 고딕"/>
+                <a:ea typeface="맑은 고딕"/>
+              </a:rPr>
+              <a:t>수제 디저트</a:t>
+            </a:r>
+          </a:p>
+        </p:txBody>
+      </p:sp>
+      <p:cxnSp>
+        <p:nvCxnSpPr>
+          <p:cNvPr id="9" name="Connector 8"/>
+          <p:cNvCxnSpPr/>
+          <p:nvPr/>
+        </p:nvCxnSpPr>
+        <p:spPr>
+          <a:xfrm>
+            <a:off x="1656000" y="691200"/>
+            <a:ext cx="1296000" cy="0"/>
+          </a:xfrm>
+          <a:prstGeom prst="line">
+            <a:avLst/>
+          </a:prstGeom>
+          <a:ln w="3600">
+            <a:solidFill>
+              <a:srgbClr val="E3E5E9"/>
+            </a:solidFill>
+          </a:ln>
+        </p:spPr>
+      </p:cxnSp>
+      <p:sp>
+        <p:nvSpPr>
+          <p:cNvPr id="10" name="텍스트"/>
+          <p:cNvSpPr txBox="1"/>
+          <p:nvPr/>
+        </p:nvSpPr>
+        <p:spPr>
+          <a:xfrm>
+            <a:off x="252000" y="813600"/>
+            <a:ext cx="216000" cy="99061"/>
+          </a:xfrm>
+          <a:prstGeom prst="rect">
+            <a:avLst/>
+          </a:prstGeom>
+          <a:noFill/>
+        </p:spPr>
+        <p:txBody>
+          <a:bodyPr wrap="square" lIns="0" rIns="0" tIns="0" bIns="0" anchor="t">
+            <a:spAutoFit/>
+          </a:bodyPr>
+          <a:lstStyle/>
+          <a:p>
+            <a:pPr algn="l">
+              <a:lnSpc>
+                <a:spcPts val="754"/>
+              </a:lnSpc>
+            </a:pPr>
+            <a:r>
+              <a:rPr sz="520" b="1" spc="100">
+                <a:solidFill>
+                  <a:srgbClr val="C93CE0"/>
+                </a:solidFill>
+                <a:latin typeface="맑은 고딕"/>
+                <a:ea typeface="맑은 고딕"/>
+              </a:rPr>
+              <a:t>03</a:t>
+            </a:r>
+          </a:p>
+        </p:txBody>
+      </p:sp>
+      <p:sp>
+        <p:nvSpPr>
+          <p:cNvPr id="11" name="텍스트"/>
+          <p:cNvSpPr txBox="1"/>
+          <p:nvPr/>
+        </p:nvSpPr>
+        <p:spPr>
+          <a:xfrm>
+            <a:off x="475200" y="802800"/>
+            <a:ext cx="1152000" cy="140971"/>
+          </a:xfrm>
+          <a:prstGeom prst="rect">
+            <a:avLst/>
+          </a:prstGeom>
+          <a:noFill/>
+        </p:spPr>
+        <p:txBody>
+          <a:bodyPr wrap="square" lIns="0" rIns="0" tIns="0" bIns="0" anchor="t">
+            <a:spAutoFit/>
+          </a:bodyPr>
+          <a:lstStyle/>
+          <a:p>
+            <a:pPr algn="l">
+              <a:lnSpc>
+                <a:spcPts val="1073"/>
+              </a:lnSpc>
+            </a:pPr>
+            <a:r>
+              <a:rPr sz="740" b="0">
+                <a:solidFill>
+                  <a:srgbClr val="12151C"/>
+                </a:solidFill>
+                <a:latin typeface="맑은 고딕"/>
+                <a:ea typeface="맑은 고딕"/>
+              </a:rPr>
+              <a:t>시즌 메뉴</a:t>
+            </a:r>
+          </a:p>
+        </p:txBody>
+      </p:sp>
+      <p:cxnSp>
+        <p:nvCxnSpPr>
+          <p:cNvPr id="12" name="Connector 11"/>
+          <p:cNvCxnSpPr/>
+          <p:nvPr/>
+        </p:nvCxnSpPr>
+        <p:spPr>
+          <a:xfrm>
+            <a:off x="252000" y="1036800"/>
+            <a:ext cx="1296000" cy="0"/>
+          </a:xfrm>
+          <a:prstGeom prst="line">
+            <a:avLst/>
+          </a:prstGeom>
+          <a:ln w="3600">
+            <a:solidFill>
+              <a:srgbClr val="E3E5E9"/>
+            </a:solidFill>
+          </a:ln>
+        </p:spPr>
+      </p:cxnSp>
+      <p:sp>
+        <p:nvSpPr>
+          <p:cNvPr id="13" name="텍스트"/>
+          <p:cNvSpPr txBox="1"/>
+          <p:nvPr/>
+        </p:nvSpPr>
+        <p:spPr>
+          <a:xfrm>
+            <a:off x="252000" y="1569600"/>
+            <a:ext cx="1368000" cy="114301"/>
+          </a:xfrm>
+          <a:prstGeom prst="rect">
+            <a:avLst/>
+          </a:prstGeom>
+          <a:noFill/>
+        </p:spPr>
+        <p:txBody>
+          <a:bodyPr wrap="square" lIns="0" rIns="0" tIns="0" bIns="0" anchor="t">
+            <a:spAutoFit/>
+          </a:bodyPr>
+          <a:lstStyle/>
+          <a:p>
+            <a:pPr algn="l">
+              <a:lnSpc>
+                <a:spcPts val="869"/>
+              </a:lnSpc>
+            </a:pPr>
+            <a:r>
+              <a:rPr sz="600" b="0">
                 <a:solidFill>
                   <a:srgbClr val="6B7280"/>
                 </a:solidFill>
                 <a:latin typeface="맑은 고딕"/>
                 <a:ea typeface="맑은 고딕"/>
               </a:rPr>
-              <a:t>상호명</a:t>
+              <a:t>매일 10:00 – 22:00</a:t>
+            </a:r>
+          </a:p>
+        </p:txBody>
+      </p:sp>
+      <p:sp>
+        <p:nvSpPr>
+          <p:cNvPr id="14" name="텍스트"/>
+          <p:cNvSpPr txBox="1"/>
+          <p:nvPr/>
+        </p:nvSpPr>
+        <p:spPr>
+          <a:xfrm>
+            <a:off x="1620000" y="1569600"/>
+            <a:ext cx="1368000" cy="114301"/>
+          </a:xfrm>
+          <a:prstGeom prst="rect">
+            <a:avLst/>
+          </a:prstGeom>
+          <a:noFill/>
+        </p:spPr>
+        <p:txBody>
+          <a:bodyPr wrap="square" lIns="0" rIns="0" tIns="0" bIns="0" anchor="t">
+            <a:spAutoFit/>
+          </a:bodyPr>
+          <a:lstStyle/>
+          <a:p>
+            <a:pPr algn="r">
+              <a:lnSpc>
+                <a:spcPts val="869"/>
+              </a:lnSpc>
+            </a:pPr>
+            <a:r>
+              <a:rPr sz="600" b="0">
+                <a:solidFill>
+                  <a:srgbClr val="6B7280"/>
+                </a:solidFill>
+                <a:latin typeface="맑은 고딕"/>
+                <a:ea typeface="맑은 고딕"/>
+              </a:rPr>
+              <a:t>blog.example.com</a:t>
             </a:r>
           </a:p>
         </p:txBody>
